--- a/CLOUDFORCE_Fraud_Ring_Early_Warning_screenshots.pptx
+++ b/CLOUDFORCE_Fraud_Ring_Early_Warning_screenshots.pptx
@@ -3863,92 +3863,24 @@
       </p:sp>
       <p:sp>
         <p:nvSpPr>
-          <p:cNvPr id="3" name="TextBox 2"/>
-          <p:cNvSpPr txBox="1"/>
-          <p:nvPr/>
-        </p:nvSpPr>
-        <p:spPr>
-          <a:xfrm>
-            <a:off x="731520" y="1645920"/>
-            <a:ext cx="10607040" cy="4114800"/>
-          </a:xfrm>
-          <a:prstGeom prst="rect">
-            <a:avLst/>
-          </a:prstGeom>
-          <a:noFill/>
-        </p:spPr>
-        <p:txBody>
-          <a:bodyPr wrap="square">
-            <a:spAutoFit/>
-          </a:bodyPr>
-          <a:lstStyle/>
-          <a:p>
-            <a:pPr>
-              <a:spcAft>
-                <a:spcPts val="1000"/>
-              </a:spcAft>
-              <a:defRPr sz="2000">
-                <a:solidFill>
-                  <a:srgbClr val="F8FAFC"/>
-                </a:solidFill>
-              </a:defRPr>
-            </a:pPr>
-            <a:r>
-              <a:t>A visual landing page that explains the problem in plain English.</a:t>
-            </a:r>
-          </a:p>
-          <a:p>
-            <a:pPr>
-              <a:spcAft>
-                <a:spcPts val="1000"/>
-              </a:spcAft>
-              <a:defRPr sz="2000">
-                <a:solidFill>
-                  <a:srgbClr val="F8FAFC"/>
-                </a:solidFill>
-              </a:defRPr>
-            </a:pPr>
-            <a:r>
-              <a:t>A query UI that proves the graph returns results from a single account.</a:t>
-            </a:r>
-          </a:p>
-          <a:p>
-            <a:pPr>
-              <a:spcAft>
-                <a:spcPts val="1000"/>
-              </a:spcAft>
-              <a:defRPr sz="2000">
-                <a:solidFill>
-                  <a:srgbClr val="F8FAFC"/>
-                </a:solidFill>
-              </a:defRPr>
-            </a:pPr>
-            <a:r>
-              <a:t>A proxy-based architecture that keeps TigerGraph secrets off the browser.</a:t>
-            </a:r>
-          </a:p>
-        </p:txBody>
-      </p:sp>
-      <p:sp>
-        <p:nvSpPr>
-          <p:cNvPr id="4" name="Rectangle 3"/>
+          <p:cNvPr id="3" name="Rectangle 2"/>
           <p:cNvSpPr/>
           <p:nvPr/>
         </p:nvSpPr>
         <p:spPr>
           <a:xfrm>
-            <a:off x="502920" y="6172200"/>
-            <a:ext cx="11155680" cy="320040"/>
+            <a:off x="9646920" y="411480"/>
+            <a:ext cx="1828800" cy="1828800"/>
           </a:xfrm>
           <a:prstGeom prst="rect">
             <a:avLst/>
           </a:prstGeom>
           <a:solidFill>
-            <a:srgbClr val="1E293B"/>
+            <a:srgbClr val="10B981"/>
           </a:solidFill>
           <a:ln>
             <a:solidFill>
-              <a:srgbClr val="1E293B"/>
+              <a:srgbClr val="10B981"/>
             </a:solidFill>
           </a:ln>
         </p:spPr>
@@ -3974,9 +3906,146 @@
           </a:p>
         </p:txBody>
       </p:sp>
+      <p:pic>
+        <p:nvPicPr>
+          <p:cNvPr id="4" name="Picture 3" descr="tigergraph-logo.png"/>
+          <p:cNvPicPr>
+            <a:picLocks noChangeAspect="1"/>
+          </p:cNvPicPr>
+          <p:nvPr/>
+        </p:nvPicPr>
+        <p:blipFill>
+          <a:blip r:embed="rId2"/>
+          <a:stretch>
+            <a:fillRect/>
+          </a:stretch>
+        </p:blipFill>
+        <p:spPr>
+          <a:xfrm>
+            <a:off x="9784080" y="548640"/>
+            <a:ext cx="1554480" cy="1554480"/>
+          </a:xfrm>
+          <a:prstGeom prst="rect">
+            <a:avLst/>
+          </a:prstGeom>
+        </p:spPr>
+      </p:pic>
       <p:sp>
         <p:nvSpPr>
           <p:cNvPr id="5" name="TextBox 4"/>
+          <p:cNvSpPr txBox="1"/>
+          <p:nvPr/>
+        </p:nvSpPr>
+        <p:spPr>
+          <a:xfrm>
+            <a:off x="731520" y="1645920"/>
+            <a:ext cx="10607040" cy="4114800"/>
+          </a:xfrm>
+          <a:prstGeom prst="rect">
+            <a:avLst/>
+          </a:prstGeom>
+          <a:noFill/>
+        </p:spPr>
+        <p:txBody>
+          <a:bodyPr wrap="square">
+            <a:spAutoFit/>
+          </a:bodyPr>
+          <a:lstStyle/>
+          <a:p>
+            <a:pPr>
+              <a:spcAft>
+                <a:spcPts val="1000"/>
+              </a:spcAft>
+              <a:defRPr sz="2000">
+                <a:solidFill>
+                  <a:srgbClr val="F8FAFC"/>
+                </a:solidFill>
+              </a:defRPr>
+            </a:pPr>
+            <a:r>
+              <a:t>A visual landing page that explains the problem in plain English.</a:t>
+            </a:r>
+          </a:p>
+          <a:p>
+            <a:pPr>
+              <a:spcAft>
+                <a:spcPts val="1000"/>
+              </a:spcAft>
+              <a:defRPr sz="2000">
+                <a:solidFill>
+                  <a:srgbClr val="F8FAFC"/>
+                </a:solidFill>
+              </a:defRPr>
+            </a:pPr>
+            <a:r>
+              <a:t>A query UI that proves the graph returns results from a single account.</a:t>
+            </a:r>
+          </a:p>
+          <a:p>
+            <a:pPr>
+              <a:spcAft>
+                <a:spcPts val="1000"/>
+              </a:spcAft>
+              <a:defRPr sz="2000">
+                <a:solidFill>
+                  <a:srgbClr val="F8FAFC"/>
+                </a:solidFill>
+              </a:defRPr>
+            </a:pPr>
+            <a:r>
+              <a:t>A proxy-based architecture that keeps TigerGraph secrets off the browser.</a:t>
+            </a:r>
+          </a:p>
+        </p:txBody>
+      </p:sp>
+      <p:sp>
+        <p:nvSpPr>
+          <p:cNvPr id="6" name="Rectangle 5"/>
+          <p:cNvSpPr/>
+          <p:nvPr/>
+        </p:nvSpPr>
+        <p:spPr>
+          <a:xfrm>
+            <a:off x="502920" y="6172200"/>
+            <a:ext cx="11155680" cy="320040"/>
+          </a:xfrm>
+          <a:prstGeom prst="rect">
+            <a:avLst/>
+          </a:prstGeom>
+          <a:solidFill>
+            <a:srgbClr val="1E293B"/>
+          </a:solidFill>
+          <a:ln>
+            <a:solidFill>
+              <a:srgbClr val="1E293B"/>
+            </a:solidFill>
+          </a:ln>
+        </p:spPr>
+        <p:style>
+          <a:lnRef idx="1">
+            <a:schemeClr val="accent1"/>
+          </a:lnRef>
+          <a:fillRef idx="3">
+            <a:schemeClr val="accent1"/>
+          </a:fillRef>
+          <a:effectRef idx="2">
+            <a:schemeClr val="accent1"/>
+          </a:effectRef>
+          <a:fontRef idx="minor">
+            <a:schemeClr val="lt1"/>
+          </a:fontRef>
+        </p:style>
+        <p:txBody>
+          <a:bodyPr rtlCol="0" anchor="ctr"/>
+          <a:lstStyle/>
+          <a:p>
+            <a:pPr algn="ctr"/>
+          </a:p>
+        </p:txBody>
+      </p:sp>
+      <p:sp>
+        <p:nvSpPr>
+          <p:cNvPr id="7" name="TextBox 6"/>
           <p:cNvSpPr txBox="1"/>
           <p:nvPr/>
         </p:nvSpPr>
